--- a/exports/pptx/lessons/primary-module-02-panchabhuta/day-02-earth-water.pptx
+++ b/exports/pptx/lessons/primary-module-02-panchabhuta/day-02-earth-water.pptx
@@ -17,9 +17,10 @@
     <p:sldId id="265" r:id="rId11"/>
     <p:sldId id="266" r:id="rId12"/>
     <p:sldId id="267" r:id="rId13"/>
+    <p:sldId id="268" r:id="rId14"/>
   </p:sldIdLst>
   <p:notesMasterIdLst>
-    <p:notesMasterId r:id="rId14"/>
+    <p:notesMasterId r:id="rId15"/>
   </p:notesMasterIdLst>
   <p:sldSz cx="9144000" cy="5143500"/>
   <p:notesSz cx="5143500" cy="9144000"/>
@@ -801,6 +802,94 @@
             <a:fld id="{F7021451-1387-4CA6-816F-3879F97B5CBC}" type="slidenum">
               <a:rPr lang="en-US"/>
               <a:t>12</a:t>
+            </a:fld>
+            <a:endParaRPr lang="en-US"/>
+          </a:p>
+        </p:txBody>
+      </p:sp>
+    </p:spTree>
+    <p:extLst>
+      <p:ext uri="{BB962C8B-B14F-4D97-AF65-F5344CB8AC3E}">
+        <p14:creationId xmlns:p14="http://schemas.microsoft.com/office/powerpoint/2010/main" val="1024086991"/>
+      </p:ext>
+    </p:extLst>
+  </p:cSld>
+  <p:clrMapOvr>
+    <a:masterClrMapping/>
+  </p:clrMapOvr>
+</p:notes>
+</file>
+
+<file path=ppt/notesSlides/notesSlide13.xml><?xml version="1.0" encoding="utf-8"?>
+<p:notes xmlns:a="http://schemas.openxmlformats.org/drawingml/2006/main" xmlns:r="http://schemas.openxmlformats.org/officeDocument/2006/relationships" xmlns:p="http://schemas.openxmlformats.org/presentationml/2006/main">
+  <p:cSld>
+    <p:spTree>
+      <p:nvGrpSpPr>
+        <p:cNvPr id="1" name=""/>
+        <p:cNvGrpSpPr/>
+        <p:nvPr/>
+      </p:nvGrpSpPr>
+      <p:grpSpPr>
+        <a:xfrm>
+          <a:off x="0" y="0"/>
+          <a:ext cx="0" cy="0"/>
+          <a:chOff x="0" y="0"/>
+          <a:chExt cx="0" cy="0"/>
+        </a:xfrm>
+      </p:grpSpPr>
+      <p:sp>
+        <p:nvSpPr>
+          <p:cNvPr id="2" name="Slide Image Placeholder 1"/>
+          <p:cNvSpPr>
+            <a:spLocks noGrp="1" noRot="1" noChangeAspect="1"/>
+          </p:cNvSpPr>
+          <p:nvPr>
+            <p:ph type="sldImg"/>
+          </p:nvPr>
+        </p:nvSpPr>
+        <p:spPr/>
+      </p:sp>
+      <p:sp>
+        <p:nvSpPr>
+          <p:cNvPr id="3" name="Notes Placeholder 2"/>
+          <p:cNvSpPr>
+            <a:spLocks noGrp="1"/>
+          </p:cNvSpPr>
+          <p:nvPr>
+            <p:ph type="body" idx="1"/>
+          </p:nvPr>
+        </p:nvSpPr>
+        <p:spPr/>
+        <p:txBody>
+          <a:bodyPr/>
+          <a:lstStyle/>
+          <a:p>
+            <a:r>
+              <a:rPr lang="en-US" dirty="0"/>
+              <a:t/>
+            </a:r>
+            <a:endParaRPr lang="en-US" dirty="0"/>
+          </a:p>
+        </p:txBody>
+      </p:sp>
+      <p:sp>
+        <p:nvSpPr>
+          <p:cNvPr id="4" name="Slide Number Placeholder 3"/>
+          <p:cNvSpPr>
+            <a:spLocks noGrp="1"/>
+          </p:cNvSpPr>
+          <p:nvPr>
+            <p:ph type="sldNum" sz="quarter" idx="10"/>
+          </p:nvPr>
+        </p:nvSpPr>
+        <p:spPr/>
+        <p:txBody>
+          <a:bodyPr/>
+          <a:lstStyle/>
+          <a:p>
+            <a:fld id="{F7021451-1387-4CA6-816F-3879F97B5CBC}" type="slidenum">
+              <a:rPr lang="en-US"/>
+              <a:t>13</a:t>
             </a:fld>
             <a:endParaRPr lang="en-US"/>
           </a:p>
@@ -2054,194 +2143,6 @@
         </p:nvSpPr>
         <p:spPr>
           <a:xfrm>
-            <a:off x="406301" y="1223963"/>
-            <a:ext cx="8498026" cy="274290"/>
-          </a:xfrm>
-          <a:prstGeom prst="rect">
-            <a:avLst/>
-          </a:prstGeom>
-          <a:noFill/>
-          <a:ln/>
-        </p:spPr>
-        <p:txBody>
-          <a:bodyPr wrap="square" lIns="0" tIns="0" rIns="0" bIns="0" rtlCol="0" anchor="t"/>
-          <a:lstStyle/>
-          <a:p>
-            <a:pPr algn="l" indent="0" marL="0">
-              <a:lnSpc>
-                <a:spcPts val="2160"/>
-              </a:lnSpc>
-              <a:spcBef>
-                <a:spcPts val="600"/>
-              </a:spcBef>
-              <a:spcAft>
-                <a:spcPts val="800"/>
-              </a:spcAft>
-              <a:buNone/>
-            </a:pPr>
-            <a:r>
-              <a:rPr lang="en-US" sz="1800" b="1" dirty="0">
-                <a:solidFill>
-                  <a:srgbClr val="E07A5F"/>
-                </a:solidFill>
-                <a:latin typeface="Georgia" pitchFamily="34" charset="0"/>
-                <a:ea typeface="Georgia" pitchFamily="34" charset="-122"/>
-                <a:cs typeface="Georgia" pitchFamily="34" charset="-120"/>
-              </a:rPr>
-              <a:t>Goal</a:t>
-            </a:r>
-            <a:endParaRPr lang="en-US" sz="1800" dirty="0"/>
-          </a:p>
-        </p:txBody>
-      </p:sp>
-      <p:sp>
-        <p:nvSpPr>
-          <p:cNvPr id="6" name="Text 4"/>
-          <p:cNvSpPr/>
-          <p:nvPr/>
-        </p:nvSpPr>
-        <p:spPr>
-          <a:xfrm>
-            <a:off x="406301" y="1637854"/>
-            <a:ext cx="8498026" cy="213271"/>
-          </a:xfrm>
-          <a:prstGeom prst="rect">
-            <a:avLst/>
-          </a:prstGeom>
-          <a:noFill/>
-          <a:ln/>
-        </p:spPr>
-        <p:txBody>
-          <a:bodyPr wrap="square" lIns="0" tIns="0" rIns="0" bIns="0" rtlCol="0" anchor="t"/>
-          <a:lstStyle/>
-          <a:p>
-            <a:pPr algn="l" indent="0" marL="0">
-              <a:lnSpc>
-                <a:spcPts val="1680"/>
-              </a:lnSpc>
-              <a:spcBef>
-                <a:spcPts val="300"/>
-              </a:spcBef>
-              <a:spcAft>
-                <a:spcPts val="300"/>
-              </a:spcAft>
-              <a:buNone/>
-            </a:pPr>
-            <a:r>
-              <a:rPr lang="en-US" sz="1200" dirty="0">
-                <a:solidFill>
-                  <a:srgbClr val="2C2C2C"/>
-                </a:solidFill>
-                <a:latin typeface="Verdana" pitchFamily="34" charset="0"/>
-                <a:ea typeface="Verdana" pitchFamily="34" charset="-122"/>
-                <a:cs typeface="Verdana" pitchFamily="34" charset="-120"/>
-              </a:rPr>
-              <a:t>Children explore </a:t>
-            </a:r>
-            <a:pPr algn="l" indent="0" marL="0">
-              <a:lnSpc>
-                <a:spcPts val="1680"/>
-              </a:lnSpc>
-              <a:spcBef>
-                <a:spcPts val="300"/>
-              </a:spcBef>
-              <a:spcAft>
-                <a:spcPts val="300"/>
-              </a:spcAft>
-              <a:buNone/>
-            </a:pPr>
-            <a:r>
-              <a:rPr lang="en-US" sz="1200" i="1" dirty="0">
-                <a:solidFill>
-                  <a:srgbClr val="2C2C2C"/>
-                </a:solidFill>
-                <a:latin typeface="Verdana" pitchFamily="34" charset="0"/>
-                <a:ea typeface="Verdana" pitchFamily="34" charset="-122"/>
-                <a:cs typeface="Verdana" pitchFamily="34" charset="-120"/>
-              </a:rPr>
-              <a:t>pṛthvī</a:t>
-            </a:r>
-            <a:pPr algn="l" indent="0" marL="0">
-              <a:lnSpc>
-                <a:spcPts val="1680"/>
-              </a:lnSpc>
-              <a:spcBef>
-                <a:spcPts val="300"/>
-              </a:spcBef>
-              <a:spcAft>
-                <a:spcPts val="300"/>
-              </a:spcAft>
-              <a:buNone/>
-            </a:pPr>
-            <a:r>
-              <a:rPr lang="en-US" sz="1200" dirty="0">
-                <a:solidFill>
-                  <a:srgbClr val="2C2C2C"/>
-                </a:solidFill>
-                <a:latin typeface="Verdana" pitchFamily="34" charset="0"/>
-                <a:ea typeface="Verdana" pitchFamily="34" charset="-122"/>
-                <a:cs typeface="Verdana" pitchFamily="34" charset="-120"/>
-              </a:rPr>
-              <a:t> and </a:t>
-            </a:r>
-            <a:pPr algn="l" indent="0" marL="0">
-              <a:lnSpc>
-                <a:spcPts val="1680"/>
-              </a:lnSpc>
-              <a:spcBef>
-                <a:spcPts val="300"/>
-              </a:spcBef>
-              <a:spcAft>
-                <a:spcPts val="300"/>
-              </a:spcAft>
-              <a:buNone/>
-            </a:pPr>
-            <a:r>
-              <a:rPr lang="en-US" sz="1200" i="1" dirty="0">
-                <a:solidFill>
-                  <a:srgbClr val="2C2C2C"/>
-                </a:solidFill>
-                <a:latin typeface="Verdana" pitchFamily="34" charset="0"/>
-                <a:ea typeface="Verdana" pitchFamily="34" charset="-122"/>
-                <a:cs typeface="Verdana" pitchFamily="34" charset="-120"/>
-              </a:rPr>
-              <a:t>ap</a:t>
-            </a:r>
-            <a:pPr algn="l" indent="0" marL="0">
-              <a:lnSpc>
-                <a:spcPts val="1680"/>
-              </a:lnSpc>
-              <a:spcBef>
-                <a:spcPts val="300"/>
-              </a:spcBef>
-              <a:spcAft>
-                <a:spcPts val="300"/>
-              </a:spcAft>
-              <a:buNone/>
-            </a:pPr>
-            <a:r>
-              <a:rPr lang="en-US" sz="1200" dirty="0">
-                <a:solidFill>
-                  <a:srgbClr val="2C2C2C"/>
-                </a:solidFill>
-                <a:latin typeface="Verdana" pitchFamily="34" charset="0"/>
-                <a:ea typeface="Verdana" pitchFamily="34" charset="-122"/>
-                <a:cs typeface="Verdana" pitchFamily="34" charset="-120"/>
-              </a:rPr>
-              <a:t> through touching, sorting, and drawing.</a:t>
-            </a:r>
-            <a:endParaRPr lang="en-US" sz="1200" dirty="0"/>
-          </a:p>
-        </p:txBody>
-      </p:sp>
-      <p:sp>
-        <p:nvSpPr>
-          <p:cNvPr id="7" name="Text 5"/>
-          <p:cNvSpPr/>
-          <p:nvPr/>
-        </p:nvSpPr>
-        <p:spPr>
-          <a:xfrm>
             <a:off x="406301" y="4434929"/>
             <a:ext cx="8498026" cy="213271"/>
           </a:xfrm>
@@ -2386,7 +2287,7 @@
                 <a:ea typeface="Georgia" pitchFamily="34" charset="-122"/>
                 <a:cs typeface="Georgia" pitchFamily="34" charset="-120"/>
               </a:rPr>
-              <a:t>Homework / take-home</a:t>
+              <a:t>Show + chant (3 min)</a:t>
             </a:r>
             <a:endParaRPr lang="en-US" sz="1800" dirty="0"/>
           </a:p>
@@ -2434,7 +2335,7 @@
                 <a:ea typeface="Verdana" pitchFamily="34" charset="-122"/>
                 <a:cs typeface="Verdana" pitchFamily="34" charset="-120"/>
               </a:rPr>
-              <a:t>– Tomorrow bring: ONE thing that gives warmth or light (a candle? a torch? a picture of the sun?).</a:t>
+              <a:t>2 children hold up their drawings. Class names one Pṛthvī thing and one Ap thing.</a:t>
             </a:r>
             <a:endParaRPr lang="en-US" sz="1200" dirty="0"/>
           </a:p>
@@ -2443,6 +2344,54 @@
       <p:sp>
         <p:nvSpPr>
           <p:cNvPr id="5" name="Text 3"/>
+          <p:cNvSpPr/>
+          <p:nvPr/>
+        </p:nvSpPr>
+        <p:spPr>
+          <a:xfrm>
+            <a:off x="406301" y="1160413"/>
+            <a:ext cx="8498026" cy="213271"/>
+          </a:xfrm>
+          <a:prstGeom prst="rect">
+            <a:avLst/>
+          </a:prstGeom>
+          <a:noFill/>
+          <a:ln/>
+        </p:spPr>
+        <p:txBody>
+          <a:bodyPr wrap="square" lIns="0" tIns="0" rIns="0" bIns="0" rtlCol="0" anchor="t"/>
+          <a:lstStyle/>
+          <a:p>
+            <a:pPr algn="l" indent="0" marL="0">
+              <a:lnSpc>
+                <a:spcPts val="1680"/>
+              </a:lnSpc>
+              <a:spcBef>
+                <a:spcPts val="300"/>
+              </a:spcBef>
+              <a:spcAft>
+                <a:spcPts val="300"/>
+              </a:spcAft>
+              <a:buNone/>
+            </a:pPr>
+            <a:r>
+              <a:rPr lang="en-US" sz="1200" dirty="0">
+                <a:solidFill>
+                  <a:srgbClr val="2C2C2C"/>
+                </a:solidFill>
+                <a:latin typeface="Verdana" pitchFamily="34" charset="0"/>
+                <a:ea typeface="Verdana" pitchFamily="34" charset="-122"/>
+                <a:cs typeface="Verdana" pitchFamily="34" charset="-120"/>
+              </a:rPr>
+              <a:t>Close with the chant.</a:t>
+            </a:r>
+            <a:endParaRPr lang="en-US" sz="1200" dirty="0"/>
+          </a:p>
+        </p:txBody>
+      </p:sp>
+      <p:sp>
+        <p:nvSpPr>
+          <p:cNvPr id="6" name="Text 4"/>
           <p:cNvSpPr/>
           <p:nvPr/>
         </p:nvSpPr>
@@ -2592,7 +2541,7 @@
                 <a:ea typeface="Georgia" pitchFamily="34" charset="-122"/>
                 <a:cs typeface="Georgia" pitchFamily="34" charset="-120"/>
               </a:rPr>
-              <a:t>Differentiation</a:t>
+              <a:t>Homework / take-home</a:t>
             </a:r>
             <a:endParaRPr lang="en-US" sz="1800" dirty="0"/>
           </a:p>
@@ -2607,7 +2556,7 @@
         <p:spPr>
           <a:xfrm>
             <a:off x="634901" y="883593"/>
-            <a:ext cx="8102798" cy="731341"/>
+            <a:ext cx="8102798" cy="281880"/>
           </a:xfrm>
           <a:prstGeom prst="rect">
             <a:avLst/>
@@ -2630,26 +2579,6 @@
               <a:buChar char="•"/>
             </a:pPr>
             <a:r>
-              <a:rPr lang="en-US" sz="1200" b="1" dirty="0">
-                <a:solidFill>
-                  <a:srgbClr val="2C2C2C"/>
-                </a:solidFill>
-                <a:latin typeface="Verdana" pitchFamily="34" charset="0"/>
-                <a:ea typeface="Verdana" pitchFamily="34" charset="-122"/>
-                <a:cs typeface="Verdana" pitchFamily="34" charset="-120"/>
-              </a:rPr>
-              <a:t>Tier up:</a:t>
-            </a:r>
-            <a:pPr algn="l" indent="0" marL="0">
-              <a:lnSpc>
-                <a:spcPts val="1620"/>
-              </a:lnSpc>
-              <a:spcAft>
-                <a:spcPts val="300"/>
-              </a:spcAft>
-              <a:buNone/>
-            </a:pPr>
-            <a:r>
               <a:rPr lang="en-US" sz="1200" dirty="0">
                 <a:solidFill>
                   <a:srgbClr val="2C2C2C"/>
@@ -2658,51 +2587,7 @@
                 <a:ea typeface="Verdana" pitchFamily="34" charset="-122"/>
                 <a:cs typeface="Verdana" pitchFamily="34" charset="-120"/>
               </a:rPr>
-              <a:t> Find one thing that is BOTH Pṛthvī AND Ap (a sponge with water? a wet rock?). Draw it on the back.</a:t>
-            </a:r>
-            <a:endParaRPr lang="en-US" sz="1200" dirty="0"/>
-          </a:p>
-          <a:p>
-            <a:pPr algn="l" marL="342900" indent="-342900">
-              <a:lnSpc>
-                <a:spcPts val="1620"/>
-              </a:lnSpc>
-              <a:spcAft>
-                <a:spcPts val="300"/>
-              </a:spcAft>
-              <a:buSzPct val="100000"/>
-              <a:buChar char="•"/>
-            </a:pPr>
-            <a:r>
-              <a:rPr lang="en-US" sz="1200" b="1" dirty="0">
-                <a:solidFill>
-                  <a:srgbClr val="2C2C2C"/>
-                </a:solidFill>
-                <a:latin typeface="Verdana" pitchFamily="34" charset="0"/>
-                <a:ea typeface="Verdana" pitchFamily="34" charset="-122"/>
-                <a:cs typeface="Verdana" pitchFamily="34" charset="-120"/>
-              </a:rPr>
-              <a:t>Tier down:</a:t>
-            </a:r>
-            <a:pPr algn="l" indent="0" marL="0">
-              <a:lnSpc>
-                <a:spcPts val="1620"/>
-              </a:lnSpc>
-              <a:spcAft>
-                <a:spcPts val="300"/>
-              </a:spcAft>
-              <a:buNone/>
-            </a:pPr>
-            <a:r>
-              <a:rPr lang="en-US" sz="1200" dirty="0">
-                <a:solidFill>
-                  <a:srgbClr val="2C2C2C"/>
-                </a:solidFill>
-                <a:latin typeface="Verdana" pitchFamily="34" charset="0"/>
-                <a:ea typeface="Verdana" pitchFamily="34" charset="-122"/>
-                <a:cs typeface="Verdana" pitchFamily="34" charset="-120"/>
-              </a:rPr>
-              <a:t> Just sort the bring-from-home objects into 2 piles — solid or liquid. Drawing optional.</a:t>
+              <a:t>Tomorrow bring: ONE thing that gives warmth or light (a candle? a torch? a picture of the sun?).</a:t>
             </a:r>
             <a:endParaRPr lang="en-US" sz="1200" dirty="0"/>
           </a:p>
@@ -2860,7 +2745,7 @@
                 <a:ea typeface="Georgia" pitchFamily="34" charset="-122"/>
                 <a:cs typeface="Georgia" pitchFamily="34" charset="-120"/>
               </a:rPr>
-              <a:t>Teacher's quick notes</a:t>
+              <a:t>Differentiation</a:t>
             </a:r>
             <a:endParaRPr lang="en-US" sz="1800" dirty="0"/>
           </a:p>
@@ -2874,8 +2759,8 @@
         </p:nvSpPr>
         <p:spPr>
           <a:xfrm>
-            <a:off x="406301" y="870942"/>
-            <a:ext cx="8498026" cy="639812"/>
+            <a:off x="634901" y="883593"/>
+            <a:ext cx="8102798" cy="731341"/>
           </a:xfrm>
           <a:prstGeom prst="rect">
             <a:avLst/>
@@ -2887,8 +2772,118 @@
           <a:bodyPr wrap="square" lIns="0" tIns="0" rIns="0" bIns="0" rtlCol="0" anchor="t"/>
           <a:lstStyle/>
           <a:p>
+            <a:pPr algn="l" marL="342900" indent="-342900">
+              <a:lnSpc>
+                <a:spcPts val="1620"/>
+              </a:lnSpc>
+              <a:spcAft>
+                <a:spcPts val="300"/>
+              </a:spcAft>
+              <a:buSzPct val="100000"/>
+              <a:buChar char="•"/>
+            </a:pPr>
+            <a:r>
+              <a:rPr lang="en-US" sz="1200" b="1" dirty="0">
+                <a:solidFill>
+                  <a:srgbClr val="2C2C2C"/>
+                </a:solidFill>
+                <a:latin typeface="Verdana" pitchFamily="34" charset="0"/>
+                <a:ea typeface="Verdana" pitchFamily="34" charset="-122"/>
+                <a:cs typeface="Verdana" pitchFamily="34" charset="-120"/>
+              </a:rPr>
+              <a:t>Tier up:</a:t>
+            </a:r>
             <a:pPr algn="l" indent="0" marL="0">
               <a:lnSpc>
+                <a:spcPts val="1620"/>
+              </a:lnSpc>
+              <a:spcAft>
+                <a:spcPts val="300"/>
+              </a:spcAft>
+              <a:buNone/>
+            </a:pPr>
+            <a:r>
+              <a:rPr lang="en-US" sz="1200" dirty="0">
+                <a:solidFill>
+                  <a:srgbClr val="2C2C2C"/>
+                </a:solidFill>
+                <a:latin typeface="Verdana" pitchFamily="34" charset="0"/>
+                <a:ea typeface="Verdana" pitchFamily="34" charset="-122"/>
+                <a:cs typeface="Verdana" pitchFamily="34" charset="-120"/>
+              </a:rPr>
+              <a:t> Find one thing that is BOTH Pṛthvī AND Ap (a sponge with water? a wet rock?). Draw it on the back.</a:t>
+            </a:r>
+            <a:endParaRPr lang="en-US" sz="1200" dirty="0"/>
+          </a:p>
+          <a:p>
+            <a:pPr algn="l" marL="342900" indent="-342900">
+              <a:lnSpc>
+                <a:spcPts val="1620"/>
+              </a:lnSpc>
+              <a:spcAft>
+                <a:spcPts val="300"/>
+              </a:spcAft>
+              <a:buSzPct val="100000"/>
+              <a:buChar char="•"/>
+            </a:pPr>
+            <a:r>
+              <a:rPr lang="en-US" sz="1200" b="1" dirty="0">
+                <a:solidFill>
+                  <a:srgbClr val="2C2C2C"/>
+                </a:solidFill>
+                <a:latin typeface="Verdana" pitchFamily="34" charset="0"/>
+                <a:ea typeface="Verdana" pitchFamily="34" charset="-122"/>
+                <a:cs typeface="Verdana" pitchFamily="34" charset="-120"/>
+              </a:rPr>
+              <a:t>Tier down:</a:t>
+            </a:r>
+            <a:pPr algn="l" indent="0" marL="0">
+              <a:lnSpc>
+                <a:spcPts val="1620"/>
+              </a:lnSpc>
+              <a:spcAft>
+                <a:spcPts val="300"/>
+              </a:spcAft>
+              <a:buNone/>
+            </a:pPr>
+            <a:r>
+              <a:rPr lang="en-US" sz="1200" dirty="0">
+                <a:solidFill>
+                  <a:srgbClr val="2C2C2C"/>
+                </a:solidFill>
+                <a:latin typeface="Verdana" pitchFamily="34" charset="0"/>
+                <a:ea typeface="Verdana" pitchFamily="34" charset="-122"/>
+                <a:cs typeface="Verdana" pitchFamily="34" charset="-120"/>
+              </a:rPr>
+              <a:t> Just sort the bring-from-home objects into 2 piles — solid or liquid. Drawing optional.</a:t>
+            </a:r>
+            <a:endParaRPr lang="en-US" sz="1200" dirty="0"/>
+          </a:p>
+        </p:txBody>
+      </p:sp>
+      <p:sp>
+        <p:nvSpPr>
+          <p:cNvPr id="5" name="Text 3"/>
+          <p:cNvSpPr/>
+          <p:nvPr/>
+        </p:nvSpPr>
+        <p:spPr>
+          <a:xfrm>
+            <a:off x="406301" y="4434929"/>
+            <a:ext cx="8498026" cy="213271"/>
+          </a:xfrm>
+          <a:prstGeom prst="rect">
+            <a:avLst/>
+          </a:prstGeom>
+          <a:noFill/>
+          <a:ln/>
+        </p:spPr>
+        <p:txBody>
+          <a:bodyPr wrap="square" lIns="0" tIns="0" rIns="0" bIns="0" rtlCol="0" anchor="t"/>
+          <a:lstStyle/>
+          <a:p>
+            <a:pPr algn="l" indent="0" marL="0">
+              <a:lnSpc>
                 <a:spcPts val="1680"/>
               </a:lnSpc>
               <a:spcBef>
@@ -2908,16 +2903,169 @@
                 <a:ea typeface="Verdana" pitchFamily="34" charset="-122"/>
                 <a:cs typeface="Verdana" pitchFamily="34" charset="-120"/>
               </a:rPr>
-              <a:t>– The sponge demonstration ("water inside something solid") is great for showing that real things often have </a:t>
-            </a:r>
+              <a:t>Primary ·  · IKS Curriculum</a:t>
+            </a:r>
+            <a:endParaRPr lang="en-US" sz="1200" dirty="0"/>
+          </a:p>
+        </p:txBody>
+      </p:sp>
+    </p:spTree>
+  </p:cSld>
+  <p:clrMapOvr>
+    <a:masterClrMapping/>
+  </p:clrMapOvr>
+</p:sld>
+</file>
+
+<file path=ppt/slides/slide13.xml><?xml version="1.0" encoding="utf-8"?>
+<p:sld xmlns:a="http://schemas.openxmlformats.org/drawingml/2006/main" xmlns:r="http://schemas.openxmlformats.org/officeDocument/2006/relationships" xmlns:p="http://schemas.openxmlformats.org/presentationml/2006/main">
+  <p:cSld name="Slide 13">
+    <p:bg>
+      <p:bgPr>
+        <a:solidFill>
+          <a:srgbClr val="FAF7F2"/>
+        </a:solidFill>
+      </p:bgPr>
+    </p:bg>
+    <p:spTree>
+      <p:nvGrpSpPr>
+        <p:cNvPr id="1" name=""/>
+        <p:cNvGrpSpPr/>
+        <p:nvPr/>
+      </p:nvGrpSpPr>
+      <p:grpSpPr>
+        <a:xfrm>
+          <a:off x="0" y="0"/>
+          <a:ext cx="0" cy="0"/>
+          <a:chOff x="0" y="0"/>
+          <a:chExt cx="0" cy="0"/>
+        </a:xfrm>
+      </p:grpSpPr>
+      <p:sp>
+        <p:nvSpPr>
+          <p:cNvPr id="2" name="Text 0"/>
+          <p:cNvSpPr/>
+          <p:nvPr/>
+        </p:nvSpPr>
+        <p:spPr>
+          <a:xfrm>
+            <a:off x="0" y="0"/>
+            <a:ext cx="9144000" cy="101501"/>
+          </a:xfrm>
+          <a:prstGeom prst="rect">
+            <a:avLst/>
+          </a:prstGeom>
+          <a:solidFill>
+            <a:srgbClr val="87A96B"/>
+          </a:solidFill>
+          <a:ln/>
+        </p:spPr>
+        <p:txBody>
+          <a:bodyPr wrap="square" rtlCol="0" anchor="ctr"/>
+          <a:lstStyle/>
+          <a:p>
+            <a:pPr indent="0" marL="0">
+              <a:buNone/>
+            </a:pPr>
+            <a:endParaRPr lang="en-US" dirty="0"/>
+          </a:p>
+        </p:txBody>
+      </p:sp>
+      <p:sp>
+        <p:nvSpPr>
+          <p:cNvPr id="3" name="Text 1"/>
+          <p:cNvSpPr/>
+          <p:nvPr/>
+        </p:nvSpPr>
+        <p:spPr>
+          <a:xfrm>
+            <a:off x="406301" y="457051"/>
+            <a:ext cx="8498026" cy="274290"/>
+          </a:xfrm>
+          <a:prstGeom prst="rect">
+            <a:avLst/>
+          </a:prstGeom>
+          <a:noFill/>
+          <a:ln/>
+        </p:spPr>
+        <p:txBody>
+          <a:bodyPr wrap="square" lIns="0" tIns="0" rIns="0" bIns="0" rtlCol="0" anchor="t"/>
+          <a:lstStyle/>
+          <a:p>
             <a:pPr algn="l" indent="0" marL="0">
               <a:lnSpc>
-                <a:spcPts val="1680"/>
+                <a:spcPts val="2160"/>
               </a:lnSpc>
               <a:spcBef>
-                <a:spcPts val="300"/>
+                <a:spcPts val="600"/>
               </a:spcBef>
               <a:spcAft>
+                <a:spcPts val="800"/>
+              </a:spcAft>
+              <a:buNone/>
+            </a:pPr>
+            <a:r>
+              <a:rPr lang="en-US" sz="1800" b="1" dirty="0">
+                <a:solidFill>
+                  <a:srgbClr val="E07A5F"/>
+                </a:solidFill>
+                <a:latin typeface="Georgia" pitchFamily="34" charset="0"/>
+                <a:ea typeface="Georgia" pitchFamily="34" charset="-122"/>
+                <a:cs typeface="Georgia" pitchFamily="34" charset="-120"/>
+              </a:rPr>
+              <a:t>Teacher's quick notes</a:t>
+            </a:r>
+            <a:endParaRPr lang="en-US" sz="1800" dirty="0"/>
+          </a:p>
+        </p:txBody>
+      </p:sp>
+      <p:sp>
+        <p:nvSpPr>
+          <p:cNvPr id="4" name="Text 2"/>
+          <p:cNvSpPr/>
+          <p:nvPr/>
+        </p:nvSpPr>
+        <p:spPr>
+          <a:xfrm>
+            <a:off x="634901" y="883593"/>
+            <a:ext cx="8102798" cy="937022"/>
+          </a:xfrm>
+          <a:prstGeom prst="rect">
+            <a:avLst/>
+          </a:prstGeom>
+          <a:noFill/>
+          <a:ln/>
+        </p:spPr>
+        <p:txBody>
+          <a:bodyPr wrap="square" lIns="0" tIns="0" rIns="0" bIns="0" rtlCol="0" anchor="t"/>
+          <a:lstStyle/>
+          <a:p>
+            <a:pPr algn="l" marL="342900" indent="-342900">
+              <a:lnSpc>
+                <a:spcPts val="1620"/>
+              </a:lnSpc>
+              <a:spcAft>
+                <a:spcPts val="300"/>
+              </a:spcAft>
+              <a:buSzPct val="100000"/>
+              <a:buChar char="•"/>
+            </a:pPr>
+            <a:r>
+              <a:rPr lang="en-US" sz="1200" dirty="0">
+                <a:solidFill>
+                  <a:srgbClr val="2C2C2C"/>
+                </a:solidFill>
+                <a:latin typeface="Verdana" pitchFamily="34" charset="0"/>
+                <a:ea typeface="Verdana" pitchFamily="34" charset="-122"/>
+                <a:cs typeface="Verdana" pitchFamily="34" charset="-120"/>
+              </a:rPr>
+              <a:t>The sponge demonstration ("water inside something solid") is great for showing that real things often have </a:t>
+            </a:r>
+            <a:pPr algn="l" indent="0" marL="0">
+              <a:lnSpc>
+                <a:spcPts val="1620"/>
+              </a:lnSpc>
+              <a:spcAft>
                 <a:spcPts val="300"/>
               </a:spcAft>
               <a:buNone/>
@@ -2935,11 +3083,8 @@
             </a:r>
             <a:pPr algn="l" indent="0" marL="0">
               <a:lnSpc>
-                <a:spcPts val="1680"/>
-              </a:lnSpc>
-              <a:spcBef>
-                <a:spcPts val="300"/>
-              </a:spcBef>
+                <a:spcPts val="1620"/>
+              </a:lnSpc>
               <a:spcAft>
                 <a:spcPts val="300"/>
               </a:spcAft>
@@ -2954,15 +3099,36 @@
                 <a:ea typeface="Verdana" pitchFamily="34" charset="-122"/>
                 <a:cs typeface="Verdana" pitchFamily="34" charset="-120"/>
               </a:rPr>
-              <a:t> element. – A child may say "my bones are not in the floor!" — agree, explain "Pṛthvī isn't just the </a:t>
+              <a:t> element.</a:t>
+            </a:r>
+            <a:endParaRPr lang="en-US" sz="1200" dirty="0"/>
+          </a:p>
+          <a:p>
+            <a:pPr algn="l" marL="342900" indent="-342900">
+              <a:lnSpc>
+                <a:spcPts val="1620"/>
+              </a:lnSpc>
+              <a:spcAft>
+                <a:spcPts val="300"/>
+              </a:spcAft>
+              <a:buSzPct val="100000"/>
+              <a:buChar char="•"/>
+            </a:pPr>
+            <a:r>
+              <a:rPr lang="en-US" sz="1200" dirty="0">
+                <a:solidFill>
+                  <a:srgbClr val="2C2C2C"/>
+                </a:solidFill>
+                <a:latin typeface="Verdana" pitchFamily="34" charset="0"/>
+                <a:ea typeface="Verdana" pitchFamily="34" charset="-122"/>
+                <a:cs typeface="Verdana" pitchFamily="34" charset="-120"/>
+              </a:rPr>
+              <a:t>A child may say "my bones are not in the floor!" — agree, explain "Pṛthvī isn't just the </a:t>
             </a:r>
             <a:pPr algn="l" indent="0" marL="0">
               <a:lnSpc>
-                <a:spcPts val="1680"/>
-              </a:lnSpc>
-              <a:spcBef>
-                <a:spcPts val="300"/>
-              </a:spcBef>
+                <a:spcPts val="1620"/>
+              </a:lnSpc>
               <a:spcAft>
                 <a:spcPts val="300"/>
               </a:spcAft>
@@ -2981,11 +3147,8 @@
             </a:r>
             <a:pPr algn="l" indent="0" marL="0">
               <a:lnSpc>
-                <a:spcPts val="1680"/>
-              </a:lnSpc>
-              <a:spcBef>
-                <a:spcPts val="300"/>
-              </a:spcBef>
+                <a:spcPts val="1620"/>
+              </a:lnSpc>
               <a:spcAft>
                 <a:spcPts val="300"/>
               </a:spcAft>
@@ -3158,7 +3321,7 @@
                 <a:ea typeface="Georgia" pitchFamily="34" charset="-122"/>
                 <a:cs typeface="Georgia" pitchFamily="34" charset="-120"/>
               </a:rPr>
-              <a:t>Materials</a:t>
+              <a:t>Goal</a:t>
             </a:r>
             <a:endParaRPr lang="en-US" sz="1800" dirty="0"/>
           </a:p>
@@ -3173,7 +3336,7 @@
         <p:spPr>
           <a:xfrm>
             <a:off x="406301" y="870942"/>
-            <a:ext cx="8498026" cy="426541"/>
+            <a:ext cx="8498026" cy="213271"/>
           </a:xfrm>
           <a:prstGeom prst="rect">
             <a:avLst/>
@@ -3206,7 +3369,99 @@
                 <a:ea typeface="Verdana" pitchFamily="34" charset="-122"/>
                 <a:cs typeface="Verdana" pitchFamily="34" charset="-120"/>
               </a:rPr>
-              <a:t>– Bring-from-home objects (each child has 1) – A bowl of soil, a bowl of small pebbles, a jug of water, a sponge – Drawing paper</a:t>
+              <a:t>Children explore </a:t>
+            </a:r>
+            <a:pPr algn="l" indent="0" marL="0">
+              <a:lnSpc>
+                <a:spcPts val="1680"/>
+              </a:lnSpc>
+              <a:spcBef>
+                <a:spcPts val="300"/>
+              </a:spcBef>
+              <a:spcAft>
+                <a:spcPts val="300"/>
+              </a:spcAft>
+              <a:buNone/>
+            </a:pPr>
+            <a:r>
+              <a:rPr lang="en-US" sz="1200" i="1" dirty="0">
+                <a:solidFill>
+                  <a:srgbClr val="2C2C2C"/>
+                </a:solidFill>
+                <a:latin typeface="Verdana" pitchFamily="34" charset="0"/>
+                <a:ea typeface="Verdana" pitchFamily="34" charset="-122"/>
+                <a:cs typeface="Verdana" pitchFamily="34" charset="-120"/>
+              </a:rPr>
+              <a:t>pṛthvī</a:t>
+            </a:r>
+            <a:pPr algn="l" indent="0" marL="0">
+              <a:lnSpc>
+                <a:spcPts val="1680"/>
+              </a:lnSpc>
+              <a:spcBef>
+                <a:spcPts val="300"/>
+              </a:spcBef>
+              <a:spcAft>
+                <a:spcPts val="300"/>
+              </a:spcAft>
+              <a:buNone/>
+            </a:pPr>
+            <a:r>
+              <a:rPr lang="en-US" sz="1200" dirty="0">
+                <a:solidFill>
+                  <a:srgbClr val="2C2C2C"/>
+                </a:solidFill>
+                <a:latin typeface="Verdana" pitchFamily="34" charset="0"/>
+                <a:ea typeface="Verdana" pitchFamily="34" charset="-122"/>
+                <a:cs typeface="Verdana" pitchFamily="34" charset="-120"/>
+              </a:rPr>
+              <a:t> and </a:t>
+            </a:r>
+            <a:pPr algn="l" indent="0" marL="0">
+              <a:lnSpc>
+                <a:spcPts val="1680"/>
+              </a:lnSpc>
+              <a:spcBef>
+                <a:spcPts val="300"/>
+              </a:spcBef>
+              <a:spcAft>
+                <a:spcPts val="300"/>
+              </a:spcAft>
+              <a:buNone/>
+            </a:pPr>
+            <a:r>
+              <a:rPr lang="en-US" sz="1200" i="1" dirty="0">
+                <a:solidFill>
+                  <a:srgbClr val="2C2C2C"/>
+                </a:solidFill>
+                <a:latin typeface="Verdana" pitchFamily="34" charset="0"/>
+                <a:ea typeface="Verdana" pitchFamily="34" charset="-122"/>
+                <a:cs typeface="Verdana" pitchFamily="34" charset="-120"/>
+              </a:rPr>
+              <a:t>ap</a:t>
+            </a:r>
+            <a:pPr algn="l" indent="0" marL="0">
+              <a:lnSpc>
+                <a:spcPts val="1680"/>
+              </a:lnSpc>
+              <a:spcBef>
+                <a:spcPts val="300"/>
+              </a:spcBef>
+              <a:spcAft>
+                <a:spcPts val="300"/>
+              </a:spcAft>
+              <a:buNone/>
+            </a:pPr>
+            <a:r>
+              <a:rPr lang="en-US" sz="1200" dirty="0">
+                <a:solidFill>
+                  <a:srgbClr val="2C2C2C"/>
+                </a:solidFill>
+                <a:latin typeface="Verdana" pitchFamily="34" charset="0"/>
+                <a:ea typeface="Verdana" pitchFamily="34" charset="-122"/>
+                <a:cs typeface="Verdana" pitchFamily="34" charset="-120"/>
+              </a:rPr>
+              <a:t> through touching, sorting, and drawing.</a:t>
             </a:r>
             <a:endParaRPr lang="en-US" sz="1200" dirty="0"/>
           </a:p>
@@ -3364,7 +3619,7 @@
                 <a:ea typeface="Georgia" pitchFamily="34" charset="-122"/>
                 <a:cs typeface="Georgia" pitchFamily="34" charset="-120"/>
               </a:rPr>
-              <a:t>The flow</a:t>
+              <a:t>Materials</a:t>
             </a:r>
             <a:endParaRPr lang="en-US" sz="1800" dirty="0"/>
           </a:p>
@@ -3373,6 +3628,100 @@
       <p:sp>
         <p:nvSpPr>
           <p:cNvPr id="4" name="Text 2"/>
+          <p:cNvSpPr/>
+          <p:nvPr/>
+        </p:nvSpPr>
+        <p:spPr>
+          <a:xfrm>
+            <a:off x="634901" y="883593"/>
+            <a:ext cx="8102798" cy="769441"/>
+          </a:xfrm>
+          <a:prstGeom prst="rect">
+            <a:avLst/>
+          </a:prstGeom>
+          <a:noFill/>
+          <a:ln/>
+        </p:spPr>
+        <p:txBody>
+          <a:bodyPr wrap="square" lIns="0" tIns="0" rIns="0" bIns="0" rtlCol="0" anchor="t"/>
+          <a:lstStyle/>
+          <a:p>
+            <a:pPr algn="l" marL="342900" indent="-342900">
+              <a:lnSpc>
+                <a:spcPts val="1620"/>
+              </a:lnSpc>
+              <a:spcAft>
+                <a:spcPts val="300"/>
+              </a:spcAft>
+              <a:buSzPct val="100000"/>
+              <a:buChar char="•"/>
+            </a:pPr>
+            <a:r>
+              <a:rPr lang="en-US" sz="1200" dirty="0">
+                <a:solidFill>
+                  <a:srgbClr val="2C2C2C"/>
+                </a:solidFill>
+                <a:latin typeface="Verdana" pitchFamily="34" charset="0"/>
+                <a:ea typeface="Verdana" pitchFamily="34" charset="-122"/>
+                <a:cs typeface="Verdana" pitchFamily="34" charset="-120"/>
+              </a:rPr>
+              <a:t>Bring-from-home objects (each child has 1)</a:t>
+            </a:r>
+            <a:endParaRPr lang="en-US" sz="1200" dirty="0"/>
+          </a:p>
+          <a:p>
+            <a:pPr algn="l" marL="342900" indent="-342900">
+              <a:lnSpc>
+                <a:spcPts val="1620"/>
+              </a:lnSpc>
+              <a:spcAft>
+                <a:spcPts val="300"/>
+              </a:spcAft>
+              <a:buSzPct val="100000"/>
+              <a:buChar char="•"/>
+            </a:pPr>
+            <a:r>
+              <a:rPr lang="en-US" sz="1200" dirty="0">
+                <a:solidFill>
+                  <a:srgbClr val="2C2C2C"/>
+                </a:solidFill>
+                <a:latin typeface="Verdana" pitchFamily="34" charset="0"/>
+                <a:ea typeface="Verdana" pitchFamily="34" charset="-122"/>
+                <a:cs typeface="Verdana" pitchFamily="34" charset="-120"/>
+              </a:rPr>
+              <a:t>A bowl of soil, a bowl of small pebbles, a jug of water, a sponge</a:t>
+            </a:r>
+            <a:endParaRPr lang="en-US" sz="1200" dirty="0"/>
+          </a:p>
+          <a:p>
+            <a:pPr algn="l" marL="342900" indent="-342900">
+              <a:lnSpc>
+                <a:spcPts val="1620"/>
+              </a:lnSpc>
+              <a:spcAft>
+                <a:spcPts val="300"/>
+              </a:spcAft>
+              <a:buSzPct val="100000"/>
+              <a:buChar char="•"/>
+            </a:pPr>
+            <a:r>
+              <a:rPr lang="en-US" sz="1200" dirty="0">
+                <a:solidFill>
+                  <a:srgbClr val="2C2C2C"/>
+                </a:solidFill>
+                <a:latin typeface="Verdana" pitchFamily="34" charset="0"/>
+                <a:ea typeface="Verdana" pitchFamily="34" charset="-122"/>
+                <a:cs typeface="Verdana" pitchFamily="34" charset="-120"/>
+              </a:rPr>
+              <a:t>Drawing paper</a:t>
+            </a:r>
+            <a:endParaRPr lang="en-US" sz="1200" dirty="0"/>
+          </a:p>
+        </p:txBody>
+      </p:sp>
+      <p:sp>
+        <p:nvSpPr>
+          <p:cNvPr id="5" name="Text 3"/>
           <p:cNvSpPr/>
           <p:nvPr/>
         </p:nvSpPr>
@@ -3522,7 +3871,7 @@
                 <a:ea typeface="Georgia" pitchFamily="34" charset="-122"/>
                 <a:cs typeface="Georgia" pitchFamily="34" charset="-120"/>
               </a:rPr>
-              <a:t>Settle + chant (5 min)</a:t>
+              <a:t>The flow</a:t>
             </a:r>
             <a:endParaRPr lang="en-US" sz="1800" dirty="0"/>
           </a:p>
@@ -3531,100 +3880,6 @@
       <p:sp>
         <p:nvSpPr>
           <p:cNvPr id="4" name="Text 2"/>
-          <p:cNvSpPr/>
-          <p:nvPr/>
-        </p:nvSpPr>
-        <p:spPr>
-          <a:xfrm>
-            <a:off x="406301" y="870942"/>
-            <a:ext cx="8498026" cy="213271"/>
-          </a:xfrm>
-          <a:prstGeom prst="rect">
-            <a:avLst/>
-          </a:prstGeom>
-          <a:noFill/>
-          <a:ln/>
-        </p:spPr>
-        <p:txBody>
-          <a:bodyPr wrap="square" lIns="0" tIns="0" rIns="0" bIns="0" rtlCol="0" anchor="t"/>
-          <a:lstStyle/>
-          <a:p>
-            <a:pPr algn="l" indent="0" marL="0">
-              <a:lnSpc>
-                <a:spcPts val="1680"/>
-              </a:lnSpc>
-              <a:spcBef>
-                <a:spcPts val="300"/>
-              </a:spcBef>
-              <a:spcAft>
-                <a:spcPts val="300"/>
-              </a:spcAft>
-              <a:buNone/>
-            </a:pPr>
-            <a:r>
-              <a:rPr lang="en-US" sz="1200" dirty="0">
-                <a:solidFill>
-                  <a:srgbClr val="2C2C2C"/>
-                </a:solidFill>
-                <a:latin typeface="Verdana" pitchFamily="34" charset="0"/>
-                <a:ea typeface="Verdana" pitchFamily="34" charset="-122"/>
-                <a:cs typeface="Verdana" pitchFamily="34" charset="-120"/>
-              </a:rPr>
-              <a:t>Daily chant: </a:t>
-            </a:r>
-            <a:pPr algn="l" indent="0" marL="0">
-              <a:lnSpc>
-                <a:spcPts val="1680"/>
-              </a:lnSpc>
-              <a:spcBef>
-                <a:spcPts val="300"/>
-              </a:spcBef>
-              <a:spcAft>
-                <a:spcPts val="300"/>
-              </a:spcAft>
-              <a:buNone/>
-            </a:pPr>
-            <a:r>
-              <a:rPr lang="en-US" sz="1200" i="1" dirty="0">
-                <a:solidFill>
-                  <a:srgbClr val="2C2C2C"/>
-                </a:solidFill>
-                <a:latin typeface="Verdana" pitchFamily="34" charset="0"/>
-                <a:ea typeface="Verdana" pitchFamily="34" charset="-122"/>
-                <a:cs typeface="Verdana" pitchFamily="34" charset="-120"/>
-              </a:rPr>
-              <a:t>pṛthvī, ap, tejas, vāyu, ākāśa</a:t>
-            </a:r>
-            <a:pPr algn="l" indent="0" marL="0">
-              <a:lnSpc>
-                <a:spcPts val="1680"/>
-              </a:lnSpc>
-              <a:spcBef>
-                <a:spcPts val="300"/>
-              </a:spcBef>
-              <a:spcAft>
-                <a:spcPts val="300"/>
-              </a:spcAft>
-              <a:buNone/>
-            </a:pPr>
-            <a:r>
-              <a:rPr lang="en-US" sz="1200" dirty="0">
-                <a:solidFill>
-                  <a:srgbClr val="2C2C2C"/>
-                </a:solidFill>
-                <a:latin typeface="Verdana" pitchFamily="34" charset="0"/>
-                <a:ea typeface="Verdana" pitchFamily="34" charset="-122"/>
-                <a:cs typeface="Verdana" pitchFamily="34" charset="-120"/>
-              </a:rPr>
-              <a:t> — 3 times, clapping.</a:t>
-            </a:r>
-            <a:endParaRPr lang="en-US" sz="1200" dirty="0"/>
-          </a:p>
-        </p:txBody>
-      </p:sp>
-      <p:sp>
-        <p:nvSpPr>
-          <p:cNvPr id="5" name="Text 3"/>
           <p:cNvSpPr/>
           <p:nvPr/>
         </p:nvSpPr>
@@ -3774,7 +4029,7 @@
                 <a:ea typeface="Georgia" pitchFamily="34" charset="-122"/>
                 <a:cs typeface="Georgia" pitchFamily="34" charset="-120"/>
               </a:rPr>
-              <a:t>Story — recall (3 min)</a:t>
+              <a:t>Settle + chant (5 min)</a:t>
             </a:r>
             <a:endParaRPr lang="en-US" sz="1800" dirty="0"/>
           </a:p>
@@ -3814,6 +4069,29 @@
               <a:buNone/>
             </a:pPr>
             <a:r>
+              <a:rPr lang="en-US" sz="1200" dirty="0">
+                <a:solidFill>
+                  <a:srgbClr val="2C2C2C"/>
+                </a:solidFill>
+                <a:latin typeface="Verdana" pitchFamily="34" charset="0"/>
+                <a:ea typeface="Verdana" pitchFamily="34" charset="-122"/>
+                <a:cs typeface="Verdana" pitchFamily="34" charset="-120"/>
+              </a:rPr>
+              <a:t>Daily chant: </a:t>
+            </a:r>
+            <a:pPr algn="l" indent="0" marL="0">
+              <a:lnSpc>
+                <a:spcPts val="1680"/>
+              </a:lnSpc>
+              <a:spcBef>
+                <a:spcPts val="300"/>
+              </a:spcBef>
+              <a:spcAft>
+                <a:spcPts val="300"/>
+              </a:spcAft>
+              <a:buNone/>
+            </a:pPr>
+            <a:r>
               <a:rPr lang="en-US" sz="1200" i="1" dirty="0">
                 <a:solidFill>
                   <a:srgbClr val="2C2C2C"/>
@@ -3822,7 +4100,7 @@
                 <a:ea typeface="Verdana" pitchFamily="34" charset="-122"/>
                 <a:cs typeface="Verdana" pitchFamily="34" charset="-120"/>
               </a:rPr>
-              <a:t>"Yesterday we met five friends. Who can name them?"</a:t>
+              <a:t>pṛthvī, ap, tejas, vāyu, ākāśa</a:t>
             </a:r>
             <a:pPr algn="l" indent="0" marL="0">
               <a:lnSpc>
@@ -3845,7 +4123,7 @@
                 <a:ea typeface="Verdana" pitchFamily="34" charset="-122"/>
                 <a:cs typeface="Verdana" pitchFamily="34" charset="-120"/>
               </a:rPr>
-              <a:t> — chorus.</a:t>
+              <a:t> — 3 times, clapping.</a:t>
             </a:r>
             <a:endParaRPr lang="en-US" sz="1200" dirty="0"/>
           </a:p>
@@ -3854,54 +4132,6 @@
       <p:sp>
         <p:nvSpPr>
           <p:cNvPr id="5" name="Text 3"/>
-          <p:cNvSpPr/>
-          <p:nvPr/>
-        </p:nvSpPr>
-        <p:spPr>
-          <a:xfrm>
-            <a:off x="406301" y="1160413"/>
-            <a:ext cx="8498026" cy="213271"/>
-          </a:xfrm>
-          <a:prstGeom prst="rect">
-            <a:avLst/>
-          </a:prstGeom>
-          <a:noFill/>
-          <a:ln/>
-        </p:spPr>
-        <p:txBody>
-          <a:bodyPr wrap="square" lIns="0" tIns="0" rIns="0" bIns="0" rtlCol="0" anchor="t"/>
-          <a:lstStyle/>
-          <a:p>
-            <a:pPr algn="l" indent="0" marL="0">
-              <a:lnSpc>
-                <a:spcPts val="1680"/>
-              </a:lnSpc>
-              <a:spcBef>
-                <a:spcPts val="300"/>
-              </a:spcBef>
-              <a:spcAft>
-                <a:spcPts val="300"/>
-              </a:spcAft>
-              <a:buNone/>
-            </a:pPr>
-            <a:r>
-              <a:rPr lang="en-US" sz="1200" i="1" dirty="0">
-                <a:solidFill>
-                  <a:srgbClr val="2C2C2C"/>
-                </a:solidFill>
-                <a:latin typeface="Verdana" pitchFamily="34" charset="0"/>
-                <a:ea typeface="Verdana" pitchFamily="34" charset="-122"/>
-                <a:cs typeface="Verdana" pitchFamily="34" charset="-120"/>
-              </a:rPr>
-              <a:t>"Today we meet two of them more closely: Pṛthvī and Ap."</a:t>
-            </a:r>
-            <a:endParaRPr lang="en-US" sz="1200" dirty="0"/>
-          </a:p>
-        </p:txBody>
-      </p:sp>
-      <p:sp>
-        <p:nvSpPr>
-          <p:cNvPr id="6" name="Text 4"/>
           <p:cNvSpPr/>
           <p:nvPr/>
         </p:nvSpPr>
@@ -4051,7 +4281,7 @@
                 <a:ea typeface="Georgia" pitchFamily="34" charset="-122"/>
                 <a:cs typeface="Georgia" pitchFamily="34" charset="-120"/>
               </a:rPr>
-              <a:t>Touch station: Earth (7 min)</a:t>
+              <a:t>Story — recall (3 min)</a:t>
             </a:r>
             <a:endParaRPr lang="en-US" sz="1800" dirty="0"/>
           </a:p>
@@ -4066,7 +4296,7 @@
         <p:spPr>
           <a:xfrm>
             <a:off x="406301" y="870942"/>
-            <a:ext cx="8498026" cy="639812"/>
+            <a:ext cx="8498026" cy="213271"/>
           </a:xfrm>
           <a:prstGeom prst="rect">
             <a:avLst/>
@@ -4091,6 +4321,29 @@
               <a:buNone/>
             </a:pPr>
             <a:r>
+              <a:rPr lang="en-US" sz="1200" i="1" dirty="0">
+                <a:solidFill>
+                  <a:srgbClr val="2C2C2C"/>
+                </a:solidFill>
+                <a:latin typeface="Verdana" pitchFamily="34" charset="0"/>
+                <a:ea typeface="Verdana" pitchFamily="34" charset="-122"/>
+                <a:cs typeface="Verdana" pitchFamily="34" charset="-120"/>
+              </a:rPr>
+              <a:t>"Yesterday we met five friends. Who can name them?"</a:t>
+            </a:r>
+            <a:pPr algn="l" indent="0" marL="0">
+              <a:lnSpc>
+                <a:spcPts val="1680"/>
+              </a:lnSpc>
+              <a:spcBef>
+                <a:spcPts val="300"/>
+              </a:spcBef>
+              <a:spcAft>
+                <a:spcPts val="300"/>
+              </a:spcAft>
+              <a:buNone/>
+            </a:pPr>
+            <a:r>
               <a:rPr lang="en-US" sz="1200" dirty="0">
                 <a:solidFill>
                   <a:srgbClr val="2C2C2C"/>
@@ -4099,8 +4352,33 @@
                 <a:ea typeface="Verdana" pitchFamily="34" charset="-122"/>
                 <a:cs typeface="Verdana" pitchFamily="34" charset="-120"/>
               </a:rPr>
-              <a:t>– Show the bowl of soil and the bowl of pebbles. Pass them around. – Question: </a:t>
-            </a:r>
+              <a:t> — chorus.</a:t>
+            </a:r>
+            <a:endParaRPr lang="en-US" sz="1200" dirty="0"/>
+          </a:p>
+        </p:txBody>
+      </p:sp>
+      <p:sp>
+        <p:nvSpPr>
+          <p:cNvPr id="5" name="Text 3"/>
+          <p:cNvSpPr/>
+          <p:nvPr/>
+        </p:nvSpPr>
+        <p:spPr>
+          <a:xfrm>
+            <a:off x="406301" y="1160413"/>
+            <a:ext cx="8498026" cy="213271"/>
+          </a:xfrm>
+          <a:prstGeom prst="rect">
+            <a:avLst/>
+          </a:prstGeom>
+          <a:noFill/>
+          <a:ln/>
+        </p:spPr>
+        <p:txBody>
+          <a:bodyPr wrap="square" lIns="0" tIns="0" rIns="0" bIns="0" rtlCol="0" anchor="t"/>
+          <a:lstStyle/>
+          <a:p>
             <a:pPr algn="l" indent="0" marL="0">
               <a:lnSpc>
                 <a:spcPts val="1680"/>
@@ -4122,53 +4400,7 @@
                 <a:ea typeface="Verdana" pitchFamily="34" charset="-122"/>
                 <a:cs typeface="Verdana" pitchFamily="34" charset="-120"/>
               </a:rPr>
-              <a:t>"What does Pṛthvī feel like?"</a:t>
-            </a:r>
-            <a:pPr algn="l" indent="0" marL="0">
-              <a:lnSpc>
-                <a:spcPts val="1680"/>
-              </a:lnSpc>
-              <a:spcBef>
-                <a:spcPts val="300"/>
-              </a:spcBef>
-              <a:spcAft>
-                <a:spcPts val="300"/>
-              </a:spcAft>
-              <a:buNone/>
-            </a:pPr>
-            <a:r>
-              <a:rPr lang="en-US" sz="1200" dirty="0">
-                <a:solidFill>
-                  <a:srgbClr val="2C2C2C"/>
-                </a:solidFill>
-                <a:latin typeface="Verdana" pitchFamily="34" charset="0"/>
-                <a:ea typeface="Verdana" pitchFamily="34" charset="-122"/>
-                <a:cs typeface="Verdana" pitchFamily="34" charset="-120"/>
-              </a:rPr>
-              <a:t> (Hard. Soft. Cold. Rough. Smooth.) – Together: </a:t>
-            </a:r>
-            <a:pPr algn="l" indent="0" marL="0">
-              <a:lnSpc>
-                <a:spcPts val="1680"/>
-              </a:lnSpc>
-              <a:spcBef>
-                <a:spcPts val="300"/>
-              </a:spcBef>
-              <a:spcAft>
-                <a:spcPts val="300"/>
-              </a:spcAft>
-              <a:buNone/>
-            </a:pPr>
-            <a:r>
-              <a:rPr lang="en-US" sz="1200" i="1" dirty="0">
-                <a:solidFill>
-                  <a:srgbClr val="2C2C2C"/>
-                </a:solidFill>
-                <a:latin typeface="Verdana" pitchFamily="34" charset="0"/>
-                <a:ea typeface="Verdana" pitchFamily="34" charset="-122"/>
-                <a:cs typeface="Verdana" pitchFamily="34" charset="-120"/>
-              </a:rPr>
-              <a:t>"All solid things are part of Pṛthvī. The floor is Pṛthvī. Your desk is Pṛthvī. Your bones are Pṛthvī."</a:t>
+              <a:t>"Today we meet two of them more closely: Pṛthvī and Ap."</a:t>
             </a:r>
             <a:endParaRPr lang="en-US" sz="1200" dirty="0"/>
           </a:p>
@@ -4176,7 +4408,7 @@
       </p:sp>
       <p:sp>
         <p:nvSpPr>
-          <p:cNvPr id="5" name="Text 3"/>
+          <p:cNvPr id="6" name="Text 4"/>
           <p:cNvSpPr/>
           <p:nvPr/>
         </p:nvSpPr>
@@ -4326,7 +4558,7 @@
                 <a:ea typeface="Georgia" pitchFamily="34" charset="-122"/>
                 <a:cs typeface="Georgia" pitchFamily="34" charset="-120"/>
               </a:rPr>
-              <a:t>Touch station: Water (7 min)</a:t>
+              <a:t>Touch station: Earth (7 min)</a:t>
             </a:r>
             <a:endParaRPr lang="en-US" sz="1800" dirty="0"/>
           </a:p>
@@ -4340,8 +4572,8 @@
         </p:nvSpPr>
         <p:spPr>
           <a:xfrm>
-            <a:off x="406301" y="870942"/>
-            <a:ext cx="8498026" cy="639812"/>
+            <a:off x="634901" y="883593"/>
+            <a:ext cx="8102798" cy="975122"/>
           </a:xfrm>
           <a:prstGeom prst="rect">
             <a:avLst/>
@@ -4353,13 +4585,75 @@
           <a:bodyPr wrap="square" lIns="0" tIns="0" rIns="0" bIns="0" rtlCol="0" anchor="t"/>
           <a:lstStyle/>
           <a:p>
+            <a:pPr algn="l" marL="342900" indent="-342900">
+              <a:lnSpc>
+                <a:spcPts val="1620"/>
+              </a:lnSpc>
+              <a:spcAft>
+                <a:spcPts val="300"/>
+              </a:spcAft>
+              <a:buSzPct val="100000"/>
+              <a:buChar char="•"/>
+            </a:pPr>
+            <a:r>
+              <a:rPr lang="en-US" sz="1200" dirty="0">
+                <a:solidFill>
+                  <a:srgbClr val="2C2C2C"/>
+                </a:solidFill>
+                <a:latin typeface="Verdana" pitchFamily="34" charset="0"/>
+                <a:ea typeface="Verdana" pitchFamily="34" charset="-122"/>
+                <a:cs typeface="Verdana" pitchFamily="34" charset="-120"/>
+              </a:rPr>
+              <a:t>Show the bowl of soil and the bowl of pebbles. Pass them around.</a:t>
+            </a:r>
+            <a:endParaRPr lang="en-US" sz="1200" dirty="0"/>
+          </a:p>
+          <a:p>
+            <a:pPr algn="l" marL="342900" indent="-342900">
+              <a:lnSpc>
+                <a:spcPts val="1620"/>
+              </a:lnSpc>
+              <a:spcAft>
+                <a:spcPts val="300"/>
+              </a:spcAft>
+              <a:buSzPct val="100000"/>
+              <a:buChar char="•"/>
+            </a:pPr>
+            <a:r>
+              <a:rPr lang="en-US" sz="1200" dirty="0">
+                <a:solidFill>
+                  <a:srgbClr val="2C2C2C"/>
+                </a:solidFill>
+                <a:latin typeface="Verdana" pitchFamily="34" charset="0"/>
+                <a:ea typeface="Verdana" pitchFamily="34" charset="-122"/>
+                <a:cs typeface="Verdana" pitchFamily="34" charset="-120"/>
+              </a:rPr>
+              <a:t>Question: </a:t>
+            </a:r>
             <a:pPr algn="l" indent="0" marL="0">
               <a:lnSpc>
-                <a:spcPts val="1680"/>
-              </a:lnSpc>
-              <a:spcBef>
-                <a:spcPts val="300"/>
-              </a:spcBef>
+                <a:spcPts val="1620"/>
+              </a:lnSpc>
+              <a:spcAft>
+                <a:spcPts val="300"/>
+              </a:spcAft>
+              <a:buNone/>
+            </a:pPr>
+            <a:r>
+              <a:rPr lang="en-US" sz="1200" i="1" dirty="0">
+                <a:solidFill>
+                  <a:srgbClr val="2C2C2C"/>
+                </a:solidFill>
+                <a:latin typeface="Verdana" pitchFamily="34" charset="0"/>
+                <a:ea typeface="Verdana" pitchFamily="34" charset="-122"/>
+                <a:cs typeface="Verdana" pitchFamily="34" charset="-120"/>
+              </a:rPr>
+              <a:t>"What does Pṛthvī feel like?"</a:t>
+            </a:r>
+            <a:pPr algn="l" indent="0" marL="0">
+              <a:lnSpc>
+                <a:spcPts val="1620"/>
+              </a:lnSpc>
               <a:spcAft>
                 <a:spcPts val="300"/>
               </a:spcAft>
@@ -4374,15 +4668,36 @@
                 <a:ea typeface="Verdana" pitchFamily="34" charset="-122"/>
                 <a:cs typeface="Verdana" pitchFamily="34" charset="-120"/>
               </a:rPr>
-              <a:t>– Show the jug. Pour a little into a bowl. Show the sponge soaking it up. – Question: </a:t>
+              <a:t> (Hard. Soft. Cold. Rough. Smooth.)</a:t>
+            </a:r>
+            <a:endParaRPr lang="en-US" sz="1200" dirty="0"/>
+          </a:p>
+          <a:p>
+            <a:pPr algn="l" marL="342900" indent="-342900">
+              <a:lnSpc>
+                <a:spcPts val="1620"/>
+              </a:lnSpc>
+              <a:spcAft>
+                <a:spcPts val="300"/>
+              </a:spcAft>
+              <a:buSzPct val="100000"/>
+              <a:buChar char="•"/>
+            </a:pPr>
+            <a:r>
+              <a:rPr lang="en-US" sz="1200" dirty="0">
+                <a:solidFill>
+                  <a:srgbClr val="2C2C2C"/>
+                </a:solidFill>
+                <a:latin typeface="Verdana" pitchFamily="34" charset="0"/>
+                <a:ea typeface="Verdana" pitchFamily="34" charset="-122"/>
+                <a:cs typeface="Verdana" pitchFamily="34" charset="-120"/>
+              </a:rPr>
+              <a:t>Together: </a:t>
             </a:r>
             <a:pPr algn="l" indent="0" marL="0">
               <a:lnSpc>
-                <a:spcPts val="1680"/>
-              </a:lnSpc>
-              <a:spcBef>
-                <a:spcPts val="300"/>
-              </a:spcBef>
+                <a:spcPts val="1620"/>
+              </a:lnSpc>
               <a:spcAft>
                 <a:spcPts val="300"/>
               </a:spcAft>
@@ -4397,53 +4712,7 @@
                 <a:ea typeface="Verdana" pitchFamily="34" charset="-122"/>
                 <a:cs typeface="Verdana" pitchFamily="34" charset="-120"/>
               </a:rPr>
-              <a:t>"What does Ap feel like?"</a:t>
-            </a:r>
-            <a:pPr algn="l" indent="0" marL="0">
-              <a:lnSpc>
-                <a:spcPts val="1680"/>
-              </a:lnSpc>
-              <a:spcBef>
-                <a:spcPts val="300"/>
-              </a:spcBef>
-              <a:spcAft>
-                <a:spcPts val="300"/>
-              </a:spcAft>
-              <a:buNone/>
-            </a:pPr>
-            <a:r>
-              <a:rPr lang="en-US" sz="1200" dirty="0">
-                <a:solidFill>
-                  <a:srgbClr val="2C2C2C"/>
-                </a:solidFill>
-                <a:latin typeface="Verdana" pitchFamily="34" charset="0"/>
-                <a:ea typeface="Verdana" pitchFamily="34" charset="-122"/>
-                <a:cs typeface="Verdana" pitchFamily="34" charset="-120"/>
-              </a:rPr>
-              <a:t> (Wet. Cold. Flowing. Soft.) – Together: </a:t>
-            </a:r>
-            <a:pPr algn="l" indent="0" marL="0">
-              <a:lnSpc>
-                <a:spcPts val="1680"/>
-              </a:lnSpc>
-              <a:spcBef>
-                <a:spcPts val="300"/>
-              </a:spcBef>
-              <a:spcAft>
-                <a:spcPts val="300"/>
-              </a:spcAft>
-              <a:buNone/>
-            </a:pPr>
-            <a:r>
-              <a:rPr lang="en-US" sz="1200" i="1" dirty="0">
-                <a:solidFill>
-                  <a:srgbClr val="2C2C2C"/>
-                </a:solidFill>
-                <a:latin typeface="Verdana" pitchFamily="34" charset="0"/>
-                <a:ea typeface="Verdana" pitchFamily="34" charset="-122"/>
-                <a:cs typeface="Verdana" pitchFamily="34" charset="-120"/>
-              </a:rPr>
-              <a:t>"All liquid things are part of Ap. Your tears are Ap. The river is Ap. Milk is Ap."</a:t>
+              <a:t>"All solid things are part of Pṛthvī. The floor is Pṛthvī. Your desk is Pṛthvī. Your bones are Pṛthvī."</a:t>
             </a:r>
             <a:endParaRPr lang="en-US" sz="1200" dirty="0"/>
           </a:p>
@@ -4601,7 +4870,7 @@
                 <a:ea typeface="Georgia" pitchFamily="34" charset="-122"/>
                 <a:cs typeface="Georgia" pitchFamily="34" charset="-120"/>
               </a:rPr>
-              <a:t>Draw (10 min)</a:t>
+              <a:t>Touch station: Water (7 min)</a:t>
             </a:r>
             <a:endParaRPr lang="en-US" sz="1800" dirty="0"/>
           </a:p>
@@ -4615,8 +4884,8 @@
         </p:nvSpPr>
         <p:spPr>
           <a:xfrm>
-            <a:off x="406301" y="870942"/>
-            <a:ext cx="8498026" cy="426541"/>
+            <a:off x="634901" y="883593"/>
+            <a:ext cx="8102798" cy="769441"/>
           </a:xfrm>
           <a:prstGeom prst="rect">
             <a:avLst/>
@@ -4628,13 +4897,75 @@
           <a:bodyPr wrap="square" lIns="0" tIns="0" rIns="0" bIns="0" rtlCol="0" anchor="t"/>
           <a:lstStyle/>
           <a:p>
+            <a:pPr algn="l" marL="342900" indent="-342900">
+              <a:lnSpc>
+                <a:spcPts val="1620"/>
+              </a:lnSpc>
+              <a:spcAft>
+                <a:spcPts val="300"/>
+              </a:spcAft>
+              <a:buSzPct val="100000"/>
+              <a:buChar char="•"/>
+            </a:pPr>
+            <a:r>
+              <a:rPr lang="en-US" sz="1200" dirty="0">
+                <a:solidFill>
+                  <a:srgbClr val="2C2C2C"/>
+                </a:solidFill>
+                <a:latin typeface="Verdana" pitchFamily="34" charset="0"/>
+                <a:ea typeface="Verdana" pitchFamily="34" charset="-122"/>
+                <a:cs typeface="Verdana" pitchFamily="34" charset="-120"/>
+              </a:rPr>
+              <a:t>Show the jug. Pour a little into a bowl. Show the sponge soaking it up.</a:t>
+            </a:r>
+            <a:endParaRPr lang="en-US" sz="1200" dirty="0"/>
+          </a:p>
+          <a:p>
+            <a:pPr algn="l" marL="342900" indent="-342900">
+              <a:lnSpc>
+                <a:spcPts val="1620"/>
+              </a:lnSpc>
+              <a:spcAft>
+                <a:spcPts val="300"/>
+              </a:spcAft>
+              <a:buSzPct val="100000"/>
+              <a:buChar char="•"/>
+            </a:pPr>
+            <a:r>
+              <a:rPr lang="en-US" sz="1200" dirty="0">
+                <a:solidFill>
+                  <a:srgbClr val="2C2C2C"/>
+                </a:solidFill>
+                <a:latin typeface="Verdana" pitchFamily="34" charset="0"/>
+                <a:ea typeface="Verdana" pitchFamily="34" charset="-122"/>
+                <a:cs typeface="Verdana" pitchFamily="34" charset="-120"/>
+              </a:rPr>
+              <a:t>Question: </a:t>
+            </a:r>
             <a:pPr algn="l" indent="0" marL="0">
               <a:lnSpc>
-                <a:spcPts val="1680"/>
-              </a:lnSpc>
-              <a:spcBef>
-                <a:spcPts val="300"/>
-              </a:spcBef>
+                <a:spcPts val="1620"/>
+              </a:lnSpc>
+              <a:spcAft>
+                <a:spcPts val="300"/>
+              </a:spcAft>
+              <a:buNone/>
+            </a:pPr>
+            <a:r>
+              <a:rPr lang="en-US" sz="1200" i="1" dirty="0">
+                <a:solidFill>
+                  <a:srgbClr val="2C2C2C"/>
+                </a:solidFill>
+                <a:latin typeface="Verdana" pitchFamily="34" charset="0"/>
+                <a:ea typeface="Verdana" pitchFamily="34" charset="-122"/>
+                <a:cs typeface="Verdana" pitchFamily="34" charset="-120"/>
+              </a:rPr>
+              <a:t>"What does Ap feel like?"</a:t>
+            </a:r>
+            <a:pPr algn="l" indent="0" marL="0">
+              <a:lnSpc>
+                <a:spcPts val="1620"/>
+              </a:lnSpc>
               <a:spcAft>
                 <a:spcPts val="300"/>
               </a:spcAft>
@@ -4649,7 +4980,51 @@
                 <a:ea typeface="Verdana" pitchFamily="34" charset="-122"/>
                 <a:cs typeface="Verdana" pitchFamily="34" charset="-120"/>
               </a:rPr>
-              <a:t>Each child folds a paper in half. Left side: 3 things that are mostly Pṛthvī. Right side: 3 things that are mostly Ap.</a:t>
+              <a:t> (Wet. Cold. Flowing. Soft.)</a:t>
+            </a:r>
+            <a:endParaRPr lang="en-US" sz="1200" dirty="0"/>
+          </a:p>
+          <a:p>
+            <a:pPr algn="l" marL="342900" indent="-342900">
+              <a:lnSpc>
+                <a:spcPts val="1620"/>
+              </a:lnSpc>
+              <a:spcAft>
+                <a:spcPts val="300"/>
+              </a:spcAft>
+              <a:buSzPct val="100000"/>
+              <a:buChar char="•"/>
+            </a:pPr>
+            <a:r>
+              <a:rPr lang="en-US" sz="1200" dirty="0">
+                <a:solidFill>
+                  <a:srgbClr val="2C2C2C"/>
+                </a:solidFill>
+                <a:latin typeface="Verdana" pitchFamily="34" charset="0"/>
+                <a:ea typeface="Verdana" pitchFamily="34" charset="-122"/>
+                <a:cs typeface="Verdana" pitchFamily="34" charset="-120"/>
+              </a:rPr>
+              <a:t>Together: </a:t>
+            </a:r>
+            <a:pPr algn="l" indent="0" marL="0">
+              <a:lnSpc>
+                <a:spcPts val="1620"/>
+              </a:lnSpc>
+              <a:spcAft>
+                <a:spcPts val="300"/>
+              </a:spcAft>
+              <a:buNone/>
+            </a:pPr>
+            <a:r>
+              <a:rPr lang="en-US" sz="1200" i="1" dirty="0">
+                <a:solidFill>
+                  <a:srgbClr val="2C2C2C"/>
+                </a:solidFill>
+                <a:latin typeface="Verdana" pitchFamily="34" charset="0"/>
+                <a:ea typeface="Verdana" pitchFamily="34" charset="-122"/>
+                <a:cs typeface="Verdana" pitchFamily="34" charset="-120"/>
+              </a:rPr>
+              <a:t>"All liquid things are part of Ap. Your tears are Ap. The river is Ap. Milk is Ap."</a:t>
             </a:r>
             <a:endParaRPr lang="en-US" sz="1200" dirty="0"/>
           </a:p>
@@ -4807,7 +5182,7 @@
                 <a:ea typeface="Georgia" pitchFamily="34" charset="-122"/>
                 <a:cs typeface="Georgia" pitchFamily="34" charset="-120"/>
               </a:rPr>
-              <a:t>Show + chant (3 min)</a:t>
+              <a:t>Draw (10 min)</a:t>
             </a:r>
             <a:endParaRPr lang="en-US" sz="1800" dirty="0"/>
           </a:p>
@@ -4822,7 +5197,7 @@
         <p:spPr>
           <a:xfrm>
             <a:off x="406301" y="870942"/>
-            <a:ext cx="8498026" cy="213271"/>
+            <a:ext cx="8498026" cy="426541"/>
           </a:xfrm>
           <a:prstGeom prst="rect">
             <a:avLst/>
@@ -4855,7 +5230,7 @@
                 <a:ea typeface="Verdana" pitchFamily="34" charset="-122"/>
                 <a:cs typeface="Verdana" pitchFamily="34" charset="-120"/>
               </a:rPr>
-              <a:t>2 children hold up their drawings. Class names one Pṛthvī thing and one Ap thing.</a:t>
+              <a:t>Each child folds a paper in half. Left side: 3 things that are mostly Pṛthvī. Right side: 3 things that are mostly Ap.</a:t>
             </a:r>
             <a:endParaRPr lang="en-US" sz="1200" dirty="0"/>
           </a:p>
@@ -4864,54 +5239,6 @@
       <p:sp>
         <p:nvSpPr>
           <p:cNvPr id="5" name="Text 3"/>
-          <p:cNvSpPr/>
-          <p:nvPr/>
-        </p:nvSpPr>
-        <p:spPr>
-          <a:xfrm>
-            <a:off x="406301" y="1160413"/>
-            <a:ext cx="8498026" cy="213271"/>
-          </a:xfrm>
-          <a:prstGeom prst="rect">
-            <a:avLst/>
-          </a:prstGeom>
-          <a:noFill/>
-          <a:ln/>
-        </p:spPr>
-        <p:txBody>
-          <a:bodyPr wrap="square" lIns="0" tIns="0" rIns="0" bIns="0" rtlCol="0" anchor="t"/>
-          <a:lstStyle/>
-          <a:p>
-            <a:pPr algn="l" indent="0" marL="0">
-              <a:lnSpc>
-                <a:spcPts val="1680"/>
-              </a:lnSpc>
-              <a:spcBef>
-                <a:spcPts val="300"/>
-              </a:spcBef>
-              <a:spcAft>
-                <a:spcPts val="300"/>
-              </a:spcAft>
-              <a:buNone/>
-            </a:pPr>
-            <a:r>
-              <a:rPr lang="en-US" sz="1200" dirty="0">
-                <a:solidFill>
-                  <a:srgbClr val="2C2C2C"/>
-                </a:solidFill>
-                <a:latin typeface="Verdana" pitchFamily="34" charset="0"/>
-                <a:ea typeface="Verdana" pitchFamily="34" charset="-122"/>
-                <a:cs typeface="Verdana" pitchFamily="34" charset="-120"/>
-              </a:rPr>
-              <a:t>Close with the chant.</a:t>
-            </a:r>
-            <a:endParaRPr lang="en-US" sz="1200" dirty="0"/>
-          </a:p>
-        </p:txBody>
-      </p:sp>
-      <p:sp>
-        <p:nvSpPr>
-          <p:cNvPr id="6" name="Text 4"/>
           <p:cNvSpPr/>
           <p:nvPr/>
         </p:nvSpPr>
